--- a/08-materiais/modelos/deck-conselheiro.pptx
+++ b/08-materiais/modelos/deck-conselheiro.pptx
@@ -1474,7 +1474,7 @@
                 <a:ea typeface="Cambria" pitchFamily="34" charset="-122"/>
                 <a:cs typeface="Cambria" pitchFamily="34" charset="-120"/>
               </a:rPr>
-              <a:t>Direção estratégica fracionária para quem já tem IA rodando — sem o custo, nem o conflito, de mais um diretor em folha.</a:t>
+              <a:t>Direção estratégica fracionária para quem já tem IA rodando. Sem o custo, nem o conflito, de mais um diretor em folha.</a:t>
             </a:r>
             <a:endParaRPr lang="en-US" sz="1700" dirty="0"/>
           </a:p>
@@ -1629,7 +1629,7 @@
                 <a:ea typeface="Calibri" pitchFamily="34" charset="-122"/>
                 <a:cs typeface="Calibri" pitchFamily="34" charset="-120"/>
               </a:rPr>
-              <a:t>O Conselheiro é para a empresa que já tem IA em produção — e por isso enfrenta as perguntas que ferramenta nenhuma responde:</a:t>
+              <a:t>O Conselheiro é para a empresa que já tem IA em produção, e por isso enfrenta as perguntas que ferramenta nenhuma responde:</a:t>
             </a:r>
             <a:endParaRPr lang="en-US" sz="1300" dirty="0"/>
           </a:p>
@@ -1733,7 +1733,7 @@
                 <a:ea typeface="Cambria" pitchFamily="34" charset="-122"/>
                 <a:cs typeface="Cambria" pitchFamily="34" charset="-120"/>
               </a:rPr>
-              <a:t>O que priorizar no próximo trimestre — e o que recusar?</a:t>
+              <a:t>O que priorizar no próximo trimestre, e o que recusar?</a:t>
             </a:r>
             <a:endParaRPr lang="en-US" sz="1450" dirty="0"/>
           </a:p>
@@ -1863,7 +1863,7 @@
                 <a:ea typeface="Cambria" pitchFamily="34" charset="-122"/>
                 <a:cs typeface="Cambria" pitchFamily="34" charset="-120"/>
               </a:rPr>
-              <a:t>O que já rodou de fato mudou algum número — ou só virou demonstração?</a:t>
+              <a:t>O que já rodou de fato mudou algum número, ou só virou demonstração?</a:t>
             </a:r>
             <a:endParaRPr lang="en-US" sz="1450" dirty="0"/>
           </a:p>
@@ -2041,7 +2041,7 @@
                 <a:ea typeface="Cambria" pitchFamily="34" charset="-122"/>
                 <a:cs typeface="Cambria" pitchFamily="34" charset="-120"/>
               </a:rPr>
-              <a:t>Presença de direção, em fração — com tudo por escrito.</a:t>
+              <a:t>Presença de direção, em fração. Com tudo por escrito.</a:t>
             </a:r>
             <a:endParaRPr lang="en-US" sz="2700" dirty="0"/>
           </a:p>
@@ -2288,7 +2288,7 @@
                 <a:ea typeface="Calibri" pitchFamily="34" charset="-122"/>
                 <a:cs typeface="Calibri" pitchFamily="34" charset="-120"/>
               </a:rPr>
-              <a:t>a fila de oportunidades mantida e re-ranqueada conforme os números chegam — nunca um PDF parado.</a:t>
+              <a:t>a fila de oportunidades mantida e re-ranqueada conforme os números chegam. Nunca um PDF parado.</a:t>
             </a:r>
             <a:endParaRPr lang="en-US" sz="1300" dirty="0"/>
           </a:p>
@@ -2496,7 +2496,7 @@
                 <a:ea typeface="Calibri" pitchFamily="34" charset="-122"/>
                 <a:cs typeface="Calibri" pitchFamily="34" charset="-120"/>
               </a:rPr>
-              <a:t>cada decisão registrada com a expectativa declarada antes e o resultado medido depois — imutável por construção.</a:t>
+              <a:t>cada decisão registrada com a expectativa declarada antes e o resultado medido depois. Imutável por construção.</a:t>
             </a:r>
             <a:endParaRPr lang="en-US" sz="1300" dirty="0"/>
           </a:p>
@@ -2908,7 +2908,7 @@
                 <a:ea typeface="Calibri" pitchFamily="34" charset="-122"/>
                 <a:cs typeface="Calibri" pitchFamily="34" charset="-120"/>
               </a:rPr>
-              <a:t>Quem executa não pode atestar o próprio resultado — é a razão pela qual empresas com um ótimo CFO ainda contratam quem verifique as contas de fora. O Conselheiro traz exatamente isso para a IA: a expectativa declarada antes e imutável, o resultado medido e assinado por uma pessoa nomeada da sua empresa, o histórico que nunca se apaga.</a:t>
+              <a:t>Quem executa não pode atestar o próprio resultado. É a razão pela qual empresas com um ótimo CFO ainda contratam quem verifique as contas de fora. O Conselheiro traz exatamente isso para a IA: a expectativa declarada antes e imutável, o resultado medido e assinado por uma pessoa nomeada da sua empresa, o histórico que nunca se apaga.</a:t>
             </a:r>
             <a:endParaRPr lang="en-US" sz="1500" dirty="0"/>
           </a:p>
@@ -2937,7 +2937,7 @@
                 <a:ea typeface="Calibri" pitchFamily="34" charset="-122"/>
                 <a:cs typeface="Calibri" pitchFamily="34" charset="-120"/>
               </a:rPr>
-              <a:t>Um diretor de IA contratado amanhã não substitui esse registro — ele o herda, e trabalha melhor por causa dele.</a:t>
+              <a:t>Um diretor de IA contratado amanhã não substitui esse registro. Ele o herda, e trabalha melhor por causa dele.</a:t>
             </a:r>
             <a:endParaRPr lang="en-US" sz="1500" dirty="0"/>
           </a:p>
@@ -3002,7 +3002,7 @@
                 <a:ea typeface="Cambria" pitchFamily="34" charset="-122"/>
                 <a:cs typeface="Cambria" pitchFamily="34" charset="-120"/>
               </a:rPr>
-              <a:t>Sem exclusividade forçada, sem contrato que prende: a memória é sua e é exportável. A permanência se paga em valor — ou não se paga.</a:t>
+              <a:t>Sem exclusividade forçada, sem contrato que prende: a memória é sua e é exportável. A permanência se paga em valor, ou não se paga.</a:t>
             </a:r>
             <a:endParaRPr lang="en-US" sz="1350" dirty="0"/>
           </a:p>
@@ -3115,7 +3115,7 @@
                 <a:ea typeface="Cambria" pitchFamily="34" charset="-122"/>
                 <a:cs typeface="Cambria" pitchFamily="34" charset="-120"/>
               </a:rPr>
-              <a:t>Uma conversa de 45 minutos sobre a sua pauta de IA — e um parecer de exemplo sobre um fornecedor que já esteja na sua mesa.</a:t>
+              <a:t>Uma conversa de 45 minutos sobre a sua pauta de IA. E um parecer de exemplo sobre um fornecedor que já esteja na sua mesa.</a:t>
             </a:r>
             <a:endParaRPr lang="en-US" sz="2600" dirty="0"/>
           </a:p>

--- a/08-materiais/modelos/deck-conselheiro.pptx
+++ b/08-materiais/modelos/deck-conselheiro.pptx
@@ -11,9 +11,10 @@
     <p:sldId id="259" r:id="rId5"/>
     <p:sldId id="260" r:id="rId6"/>
     <p:sldId id="261" r:id="rId7"/>
+    <p:sldId id="262" r:id="rId8"/>
   </p:sldIdLst>
   <p:notesMasterIdLst>
-    <p:notesMasterId r:id="rId8"/>
+    <p:notesMasterId r:id="rId9"/>
   </p:notesMasterIdLst>
   <p:sldSz cx="12188952" cy="6858000"/>
   <p:notesSz cx="6858000" cy="12188952"/>
@@ -971,6 +972,94 @@
             <a:fld id="{F7021451-1387-4CA6-816F-3879F97B5CBC}" type="slidenum">
               <a:rPr lang="en-US"/>
               <a:t>6</a:t>
+            </a:fld>
+            <a:endParaRPr lang="en-US"/>
+          </a:p>
+        </p:txBody>
+      </p:sp>
+    </p:spTree>
+    <p:extLst>
+      <p:ext uri="{BB962C8B-B14F-4D97-AF65-F5344CB8AC3E}">
+        <p14:creationId xmlns:p14="http://schemas.microsoft.com/office/powerpoint/2010/main" val="1024086991"/>
+      </p:ext>
+    </p:extLst>
+  </p:cSld>
+  <p:clrMapOvr>
+    <a:masterClrMapping/>
+  </p:clrMapOvr>
+</p:notes>
+</file>
+
+<file path=ppt/notesSlides/notesSlide7.xml><?xml version="1.0" encoding="utf-8"?>
+<p:notes xmlns:a="http://schemas.openxmlformats.org/drawingml/2006/main" xmlns:r="http://schemas.openxmlformats.org/officeDocument/2006/relationships" xmlns:p="http://schemas.openxmlformats.org/presentationml/2006/main">
+  <p:cSld>
+    <p:spTree>
+      <p:nvGrpSpPr>
+        <p:cNvPr id="1" name=""/>
+        <p:cNvGrpSpPr/>
+        <p:nvPr/>
+      </p:nvGrpSpPr>
+      <p:grpSpPr>
+        <a:xfrm>
+          <a:off x="0" y="0"/>
+          <a:ext cx="0" cy="0"/>
+          <a:chOff x="0" y="0"/>
+          <a:chExt cx="0" cy="0"/>
+        </a:xfrm>
+      </p:grpSpPr>
+      <p:sp>
+        <p:nvSpPr>
+          <p:cNvPr id="2" name="Slide Image Placeholder 1"/>
+          <p:cNvSpPr>
+            <a:spLocks noGrp="1" noRot="1" noChangeAspect="1"/>
+          </p:cNvSpPr>
+          <p:nvPr>
+            <p:ph type="sldImg"/>
+          </p:nvPr>
+        </p:nvSpPr>
+        <p:spPr/>
+      </p:sp>
+      <p:sp>
+        <p:nvSpPr>
+          <p:cNvPr id="3" name="Notes Placeholder 2"/>
+          <p:cNvSpPr>
+            <a:spLocks noGrp="1"/>
+          </p:cNvSpPr>
+          <p:nvPr>
+            <p:ph type="body" idx="1"/>
+          </p:nvPr>
+        </p:nvSpPr>
+        <p:spPr/>
+        <p:txBody>
+          <a:bodyPr/>
+          <a:lstStyle/>
+          <a:p>
+            <a:r>
+              <a:rPr lang="en-US" dirty="0"/>
+              <a:t/>
+            </a:r>
+            <a:endParaRPr lang="en-US" dirty="0"/>
+          </a:p>
+        </p:txBody>
+      </p:sp>
+      <p:sp>
+        <p:nvSpPr>
+          <p:cNvPr id="4" name="Slide Number Placeholder 3"/>
+          <p:cNvSpPr>
+            <a:spLocks noGrp="1"/>
+          </p:cNvSpPr>
+          <p:nvPr>
+            <p:ph type="sldNum" sz="quarter" idx="10"/>
+          </p:nvPr>
+        </p:nvSpPr>
+        <p:spPr/>
+        <p:txBody>
+          <a:bodyPr/>
+          <a:lstStyle/>
+          <a:p>
+            <a:fld id="{F7021451-1387-4CA6-816F-3879F97B5CBC}" type="slidenum">
+              <a:rPr lang="en-US"/>
+              <a:t>7</a:t>
             </a:fld>
             <a:endParaRPr lang="en-US"/>
           </a:p>
@@ -2184,7 +2273,7 @@
                 <a:ea typeface="Calibri" pitchFamily="34" charset="-122"/>
                 <a:cs typeface="Calibri" pitchFamily="34" charset="-120"/>
               </a:rPr>
-              <a:t>presença recorrente nas reuniões de direção: a pauta de IA preparada, defendida e registrada.</a:t>
+              <a:t>presença estruturada e recorrente: resultados contra os objetivos que vocês declararam, no máximo três recomendações priorizadas por encontro, decisões registradas em ata.</a:t>
             </a:r>
             <a:endParaRPr lang="en-US" sz="1300" dirty="0"/>
           </a:p>
@@ -2288,7 +2377,7 @@
                 <a:ea typeface="Calibri" pitchFamily="34" charset="-122"/>
                 <a:cs typeface="Calibri" pitchFamily="34" charset="-120"/>
               </a:rPr>
-              <a:t>a fila de oportunidades mantida e re-ranqueada conforme os números chegam. Nunca um PDF parado.</a:t>
+              <a:t>a fila de oportunidades mantida e re-ranqueada conforme os números chegam, para que a empresa decida a própria agenda de IA em vez de reagir à agenda de quem vende.</a:t>
             </a:r>
             <a:endParaRPr lang="en-US" sz="1300" dirty="0"/>
           </a:p>
@@ -2392,7 +2481,7 @@
                 <a:ea typeface="Calibri" pitchFamily="34" charset="-122"/>
                 <a:cs typeface="Calibri" pitchFamily="34" charset="-120"/>
               </a:rPr>
-              <a:t>parecer por escrito sobre cada proposta que chega à mesa: o que é real, o que é caro, o que é risco.</a:t>
+              <a:t>cada proposta que chega à mesa vira um parecer por escrito, em até cinco dias úteis: isso é real? é para nós? qual o preço justo?</a:t>
             </a:r>
             <a:endParaRPr lang="en-US" sz="1300" dirty="0"/>
           </a:p>
@@ -2496,7 +2585,7 @@
                 <a:ea typeface="Calibri" pitchFamily="34" charset="-122"/>
                 <a:cs typeface="Calibri" pitchFamily="34" charset="-120"/>
               </a:rPr>
-              <a:t>cada decisão registrada com a expectativa declarada antes e o resultado medido depois. Imutável por construção.</a:t>
+              <a:t>cada recomendação entra no registro com o número que dirá, depois, se deu certo: expectativa declarada antes, resultado medido depois, imutável por construção.</a:t>
             </a:r>
             <a:endParaRPr lang="en-US" sz="1300" dirty="0"/>
           </a:p>
@@ -2567,7 +2656,7 @@
                 <a:ea typeface="Calibri" pitchFamily="34" charset="-122"/>
                 <a:cs typeface="Calibri" pitchFamily="34" charset="-120"/>
               </a:rPr>
-              <a:t>COMO SE PARECE</a:t>
+              <a:t>A HONESTIDADE DE SEMPRE</a:t>
             </a:r>
             <a:endParaRPr lang="en-US" sz="1100" dirty="0"/>
           </a:p>
@@ -2609,7 +2698,7 @@
                 <a:ea typeface="Cambria" pitchFamily="34" charset="-122"/>
                 <a:cs typeface="Cambria" pitchFamily="34" charset="-120"/>
               </a:rPr>
-              <a:t>Um parecer de arbitragem de verdade.</a:t>
+              <a:t>O que o Conselheiro NÃO é.</a:t>
             </a:r>
             <a:endParaRPr lang="en-US" sz="2700" dirty="0"/>
           </a:p>
@@ -2623,27 +2712,24 @@
         </p:nvSpPr>
         <p:spPr>
           <a:xfrm>
-            <a:off x="822960" y="1920240"/>
-            <a:ext cx="10543032" cy="685800"/>
-          </a:xfrm>
-          <a:prstGeom prst="rect">
-            <a:avLst/>
-          </a:prstGeom>
-          <a:noFill/>
-          <a:ln/>
-        </p:spPr>
-        <p:txBody>
-          <a:bodyPr wrap="square" rtlCol="0" anchor="ctr"/>
-          <a:lstStyle/>
-          <a:p>
-            <a:pPr algn="l" indent="0" marL="0">
-              <a:lnSpc>
-                <a:spcPts val="2000"/>
-              </a:lnSpc>
-              <a:buNone/>
-            </a:pPr>
-            <a:r>
-              <a:rPr lang="en-US" sz="1300" dirty="0">
+            <a:off x="822960" y="6400800"/>
+            <a:ext cx="10543032" cy="274320"/>
+          </a:xfrm>
+          <a:prstGeom prst="rect">
+            <a:avLst/>
+          </a:prstGeom>
+          <a:noFill/>
+          <a:ln/>
+        </p:spPr>
+        <p:txBody>
+          <a:bodyPr wrap="square" rtlCol="0" anchor="ctr"/>
+          <a:lstStyle/>
+          <a:p>
+            <a:pPr algn="ctr" indent="0" marL="0">
+              <a:buNone/>
+            </a:pPr>
+            <a:r>
+              <a:rPr lang="en-US" sz="900" spc="100" kern="0" dirty="0">
                 <a:solidFill>
                   <a:srgbClr val="6E6858"/>
                 </a:solidFill>
@@ -2651,75 +2737,428 @@
                 <a:ea typeface="Calibri" pitchFamily="34" charset="-122"/>
                 <a:cs typeface="Calibri" pitchFamily="34" charset="-120"/>
               </a:rPr>
-              <a:t>Página real de um parecer entregue (empresa preservada): a proposta do fornecedor decomposta, o preço comparado, a recomendação assinada.</a:t>
-            </a:r>
-            <a:endParaRPr lang="en-US" sz="1300" dirty="0"/>
-          </a:p>
-        </p:txBody>
-      </p:sp>
-      <p:sp>
-        <p:nvSpPr>
-          <p:cNvPr id="5" name="Text 3"/>
-          <p:cNvSpPr/>
-          <p:nvPr/>
-        </p:nvSpPr>
-        <p:spPr>
-          <a:xfrm>
-            <a:off x="822960" y="6400800"/>
-            <a:ext cx="10543032" cy="274320"/>
-          </a:xfrm>
-          <a:prstGeom prst="rect">
-            <a:avLst/>
-          </a:prstGeom>
-          <a:noFill/>
-          <a:ln/>
-        </p:spPr>
-        <p:txBody>
-          <a:bodyPr wrap="square" rtlCol="0" anchor="ctr"/>
-          <a:lstStyle/>
-          <a:p>
-            <a:pPr algn="ctr" indent="0" marL="0">
-              <a:buNone/>
-            </a:pPr>
-            <a:r>
-              <a:rPr lang="en-US" sz="900" spc="100" kern="0" dirty="0">
-                <a:solidFill>
-                  <a:srgbClr val="6E6858"/>
+              <a:t>ABBA Consultoria de IA · contato@abbaservices.com.br</a:t>
+            </a:r>
+            <a:endParaRPr lang="en-US" sz="900" dirty="0"/>
+          </a:p>
+        </p:txBody>
+      </p:sp>
+      <p:sp>
+        <p:nvSpPr>
+          <p:cNvPr id="5" name="Shape 3"/>
+          <p:cNvSpPr/>
+          <p:nvPr/>
+        </p:nvSpPr>
+        <p:spPr>
+          <a:xfrm>
+            <a:off x="822960" y="2148840"/>
+            <a:ext cx="10543032" cy="0"/>
+          </a:xfrm>
+          <a:prstGeom prst="line">
+            <a:avLst/>
+          </a:prstGeom>
+          <a:noFill/>
+          <a:ln w="9525">
+            <a:solidFill>
+              <a:srgbClr val="E5E0D4"/>
+            </a:solidFill>
+            <a:prstDash val="solid"/>
+          </a:ln>
+        </p:spPr>
+      </p:sp>
+      <p:sp>
+        <p:nvSpPr>
+          <p:cNvPr id="6" name="Text 4"/>
+          <p:cNvSpPr/>
+          <p:nvPr/>
+        </p:nvSpPr>
+        <p:spPr>
+          <a:xfrm>
+            <a:off x="822960" y="2258568"/>
+            <a:ext cx="3108960" cy="292608"/>
+          </a:xfrm>
+          <a:prstGeom prst="rect">
+            <a:avLst/>
+          </a:prstGeom>
+          <a:noFill/>
+          <a:ln/>
+        </p:spPr>
+        <p:txBody>
+          <a:bodyPr wrap="square" rtlCol="0" anchor="ctr"/>
+          <a:lstStyle/>
+          <a:p>
+            <a:pPr algn="l" indent="0" marL="0">
+              <a:buNone/>
+            </a:pPr>
+            <a:r>
+              <a:rPr lang="en-US" sz="1050" b="1" spc="300" kern="0" dirty="0">
+                <a:solidFill>
+                  <a:srgbClr val="C2A35B"/>
                 </a:solidFill>
                 <a:latin typeface="Calibri" pitchFamily="34" charset="0"/>
                 <a:ea typeface="Calibri" pitchFamily="34" charset="-122"/>
                 <a:cs typeface="Calibri" pitchFamily="34" charset="-120"/>
               </a:rPr>
-              <a:t>ABBA Consultoria de IA · contato@abbaservices.com.br</a:t>
-            </a:r>
-            <a:endParaRPr lang="en-US" sz="900" dirty="0"/>
-          </a:p>
-        </p:txBody>
-      </p:sp>
-      <p:pic>
-        <p:nvPicPr>
-          <p:cNvPr id="6" name="Image 0" descr="/home/user/abba-ops/08-materiais/assets/fotos/conselheiro--parecer-arbitragem.jpg">    </p:cNvPr>
-          <p:cNvPicPr>
-            <a:picLocks noChangeAspect="1"/>
-          </p:cNvPicPr>
-          <p:nvPr/>
-        </p:nvPicPr>
-        <p:blipFill>
-          <a:blip r:embed="rId1"/>
-          <a:stretch>
-            <a:fillRect/>
-          </a:stretch>
-        </p:blipFill>
-        <p:spPr>
-          <a:xfrm>
-            <a:off x="4832604" y="2651760"/>
-            <a:ext cx="2523744" cy="3566160"/>
-          </a:xfrm>
-          <a:prstGeom prst="rect">
-            <a:avLst/>
-          </a:prstGeom>
-        </p:spPr>
-      </p:pic>
+              <a:t>NÃO É BANCO DE HORAS</a:t>
+            </a:r>
+            <a:endParaRPr lang="en-US" sz="1050" dirty="0"/>
+          </a:p>
+        </p:txBody>
+      </p:sp>
+      <p:sp>
+        <p:nvSpPr>
+          <p:cNvPr id="7" name="Text 5"/>
+          <p:cNvSpPr/>
+          <p:nvPr/>
+        </p:nvSpPr>
+        <p:spPr>
+          <a:xfrm>
+            <a:off x="4114800" y="2240280"/>
+            <a:ext cx="7251192" cy="822960"/>
+          </a:xfrm>
+          <a:prstGeom prst="rect">
+            <a:avLst/>
+          </a:prstGeom>
+          <a:noFill/>
+          <a:ln/>
+        </p:spPr>
+        <p:txBody>
+          <a:bodyPr wrap="square" rtlCol="0" anchor="ctr"/>
+          <a:lstStyle/>
+          <a:p>
+            <a:pPr algn="l" indent="0" marL="0">
+              <a:lnSpc>
+                <a:spcPts val="1900"/>
+              </a:lnSpc>
+              <a:buNone/>
+            </a:pPr>
+            <a:r>
+              <a:rPr lang="en-US" sz="1300" dirty="0">
+                <a:solidFill>
+                  <a:srgbClr val="33394A"/>
+                </a:solidFill>
+                <a:latin typeface="Calibri" pitchFamily="34" charset="0"/>
+                <a:ea typeface="Calibri" pitchFamily="34" charset="-122"/>
+                <a:cs typeface="Calibri" pitchFamily="34" charset="-120"/>
+              </a:rPr>
+              <a:t>é senioridade recorrente com pauta própria. Execução é cotada à parte, e você sabe o preço antes.</a:t>
+            </a:r>
+            <a:endParaRPr lang="en-US" sz="1300" dirty="0"/>
+          </a:p>
+        </p:txBody>
+      </p:sp>
+      <p:sp>
+        <p:nvSpPr>
+          <p:cNvPr id="8" name="Shape 6"/>
+          <p:cNvSpPr/>
+          <p:nvPr/>
+        </p:nvSpPr>
+        <p:spPr>
+          <a:xfrm>
+            <a:off x="822960" y="3154680"/>
+            <a:ext cx="10543032" cy="0"/>
+          </a:xfrm>
+          <a:prstGeom prst="line">
+            <a:avLst/>
+          </a:prstGeom>
+          <a:noFill/>
+          <a:ln w="9525">
+            <a:solidFill>
+              <a:srgbClr val="E5E0D4"/>
+            </a:solidFill>
+            <a:prstDash val="solid"/>
+          </a:ln>
+        </p:spPr>
+      </p:sp>
+      <p:sp>
+        <p:nvSpPr>
+          <p:cNvPr id="9" name="Text 7"/>
+          <p:cNvSpPr/>
+          <p:nvPr/>
+        </p:nvSpPr>
+        <p:spPr>
+          <a:xfrm>
+            <a:off x="822960" y="3264408"/>
+            <a:ext cx="3108960" cy="292608"/>
+          </a:xfrm>
+          <a:prstGeom prst="rect">
+            <a:avLst/>
+          </a:prstGeom>
+          <a:noFill/>
+          <a:ln/>
+        </p:spPr>
+        <p:txBody>
+          <a:bodyPr wrap="square" rtlCol="0" anchor="ctr"/>
+          <a:lstStyle/>
+          <a:p>
+            <a:pPr algn="l" indent="0" marL="0">
+              <a:buNone/>
+            </a:pPr>
+            <a:r>
+              <a:rPr lang="en-US" sz="1050" b="1" spc="300" kern="0" dirty="0">
+                <a:solidFill>
+                  <a:srgbClr val="C2A35B"/>
+                </a:solidFill>
+                <a:latin typeface="Calibri" pitchFamily="34" charset="0"/>
+                <a:ea typeface="Calibri" pitchFamily="34" charset="-122"/>
+                <a:cs typeface="Calibri" pitchFamily="34" charset="-120"/>
+              </a:rPr>
+              <a:t>NÃO É SUPORTE TÉCNICO</a:t>
+            </a:r>
+            <a:endParaRPr lang="en-US" sz="1050" dirty="0"/>
+          </a:p>
+        </p:txBody>
+      </p:sp>
+      <p:sp>
+        <p:nvSpPr>
+          <p:cNvPr id="10" name="Text 8"/>
+          <p:cNvSpPr/>
+          <p:nvPr/>
+        </p:nvSpPr>
+        <p:spPr>
+          <a:xfrm>
+            <a:off x="4114800" y="3246120"/>
+            <a:ext cx="7251192" cy="822960"/>
+          </a:xfrm>
+          <a:prstGeom prst="rect">
+            <a:avLst/>
+          </a:prstGeom>
+          <a:noFill/>
+          <a:ln/>
+        </p:spPr>
+        <p:txBody>
+          <a:bodyPr wrap="square" rtlCol="0" anchor="ctr"/>
+          <a:lstStyle/>
+          <a:p>
+            <a:pPr algn="l" indent="0" marL="0">
+              <a:lnSpc>
+                <a:spcPts val="1900"/>
+              </a:lnSpc>
+              <a:buNone/>
+            </a:pPr>
+            <a:r>
+              <a:rPr lang="en-US" sz="1300" dirty="0">
+                <a:solidFill>
+                  <a:srgbClr val="33394A"/>
+                </a:solidFill>
+                <a:latin typeface="Calibri" pitchFamily="34" charset="0"/>
+                <a:ea typeface="Calibri" pitchFamily="34" charset="-122"/>
+                <a:cs typeface="Calibri" pitchFamily="34" charset="-120"/>
+              </a:rPr>
+              <a:t>operação sob SLA é outro serviço. Os dois convivem, cada um com a sua promessa.</a:t>
+            </a:r>
+            <a:endParaRPr lang="en-US" sz="1300" dirty="0"/>
+          </a:p>
+        </p:txBody>
+      </p:sp>
+      <p:sp>
+        <p:nvSpPr>
+          <p:cNvPr id="11" name="Shape 9"/>
+          <p:cNvSpPr/>
+          <p:nvPr/>
+        </p:nvSpPr>
+        <p:spPr>
+          <a:xfrm>
+            <a:off x="822960" y="4160520"/>
+            <a:ext cx="10543032" cy="0"/>
+          </a:xfrm>
+          <a:prstGeom prst="line">
+            <a:avLst/>
+          </a:prstGeom>
+          <a:noFill/>
+          <a:ln w="9525">
+            <a:solidFill>
+              <a:srgbClr val="E5E0D4"/>
+            </a:solidFill>
+            <a:prstDash val="solid"/>
+          </a:ln>
+        </p:spPr>
+      </p:sp>
+      <p:sp>
+        <p:nvSpPr>
+          <p:cNvPr id="12" name="Text 10"/>
+          <p:cNvSpPr/>
+          <p:nvPr/>
+        </p:nvSpPr>
+        <p:spPr>
+          <a:xfrm>
+            <a:off x="822960" y="4270248"/>
+            <a:ext cx="3108960" cy="292608"/>
+          </a:xfrm>
+          <a:prstGeom prst="rect">
+            <a:avLst/>
+          </a:prstGeom>
+          <a:noFill/>
+          <a:ln/>
+        </p:spPr>
+        <p:txBody>
+          <a:bodyPr wrap="square" rtlCol="0" anchor="ctr"/>
+          <a:lstStyle/>
+          <a:p>
+            <a:pPr algn="l" indent="0" marL="0">
+              <a:buNone/>
+            </a:pPr>
+            <a:r>
+              <a:rPr lang="en-US" sz="1050" b="1" spc="300" kern="0" dirty="0">
+                <a:solidFill>
+                  <a:srgbClr val="C2A35B"/>
+                </a:solidFill>
+                <a:latin typeface="Calibri" pitchFamily="34" charset="0"/>
+                <a:ea typeface="Calibri" pitchFamily="34" charset="-122"/>
+                <a:cs typeface="Calibri" pitchFamily="34" charset="-120"/>
+              </a:rPr>
+              <a:t>NÃO É PARECER JURÍDICO</a:t>
+            </a:r>
+            <a:endParaRPr lang="en-US" sz="1050" dirty="0"/>
+          </a:p>
+        </p:txBody>
+      </p:sp>
+      <p:sp>
+        <p:nvSpPr>
+          <p:cNvPr id="13" name="Text 11"/>
+          <p:cNvSpPr/>
+          <p:nvPr/>
+        </p:nvSpPr>
+        <p:spPr>
+          <a:xfrm>
+            <a:off x="4114800" y="4251960"/>
+            <a:ext cx="7251192" cy="822960"/>
+          </a:xfrm>
+          <a:prstGeom prst="rect">
+            <a:avLst/>
+          </a:prstGeom>
+          <a:noFill/>
+          <a:ln/>
+        </p:spPr>
+        <p:txBody>
+          <a:bodyPr wrap="square" rtlCol="0" anchor="ctr"/>
+          <a:lstStyle/>
+          <a:p>
+            <a:pPr algn="l" indent="0" marL="0">
+              <a:lnSpc>
+                <a:spcPts val="1900"/>
+              </a:lnSpc>
+              <a:buNone/>
+            </a:pPr>
+            <a:r>
+              <a:rPr lang="en-US" sz="1300" dirty="0">
+                <a:solidFill>
+                  <a:srgbClr val="33394A"/>
+                </a:solidFill>
+                <a:latin typeface="Calibri" pitchFamily="34" charset="0"/>
+                <a:ea typeface="Calibri" pitchFamily="34" charset="-122"/>
+                <a:cs typeface="Calibri" pitchFamily="34" charset="-120"/>
+              </a:rPr>
+              <a:t>governança e adequação, sim; advocacia e representação perante a ANPD, não.</a:t>
+            </a:r>
+            <a:endParaRPr lang="en-US" sz="1300" dirty="0"/>
+          </a:p>
+        </p:txBody>
+      </p:sp>
+      <p:sp>
+        <p:nvSpPr>
+          <p:cNvPr id="14" name="Shape 12"/>
+          <p:cNvSpPr/>
+          <p:nvPr/>
+        </p:nvSpPr>
+        <p:spPr>
+          <a:xfrm>
+            <a:off x="822960" y="5166360"/>
+            <a:ext cx="10543032" cy="0"/>
+          </a:xfrm>
+          <a:prstGeom prst="line">
+            <a:avLst/>
+          </a:prstGeom>
+          <a:noFill/>
+          <a:ln w="9525">
+            <a:solidFill>
+              <a:srgbClr val="E5E0D4"/>
+            </a:solidFill>
+            <a:prstDash val="solid"/>
+          </a:ln>
+        </p:spPr>
+      </p:sp>
+      <p:sp>
+        <p:nvSpPr>
+          <p:cNvPr id="15" name="Text 13"/>
+          <p:cNvSpPr/>
+          <p:nvPr/>
+        </p:nvSpPr>
+        <p:spPr>
+          <a:xfrm>
+            <a:off x="822960" y="5276088"/>
+            <a:ext cx="3108960" cy="292608"/>
+          </a:xfrm>
+          <a:prstGeom prst="rect">
+            <a:avLst/>
+          </a:prstGeom>
+          <a:noFill/>
+          <a:ln/>
+        </p:spPr>
+        <p:txBody>
+          <a:bodyPr wrap="square" rtlCol="0" anchor="ctr"/>
+          <a:lstStyle/>
+          <a:p>
+            <a:pPr algn="l" indent="0" marL="0">
+              <a:buNone/>
+            </a:pPr>
+            <a:r>
+              <a:rPr lang="en-US" sz="1050" b="1" spc="300" kern="0" dirty="0">
+                <a:solidFill>
+                  <a:srgbClr val="C2A35B"/>
+                </a:solidFill>
+                <a:latin typeface="Calibri" pitchFamily="34" charset="0"/>
+                <a:ea typeface="Calibri" pitchFamily="34" charset="-122"/>
+                <a:cs typeface="Calibri" pitchFamily="34" charset="-120"/>
+              </a:rPr>
+              <a:t>NÃO É TERCEIRIZAR A DECISÃO</a:t>
+            </a:r>
+            <a:endParaRPr lang="en-US" sz="1050" dirty="0"/>
+          </a:p>
+        </p:txBody>
+      </p:sp>
+      <p:sp>
+        <p:nvSpPr>
+          <p:cNvPr id="16" name="Text 14"/>
+          <p:cNvSpPr/>
+          <p:nvPr/>
+        </p:nvSpPr>
+        <p:spPr>
+          <a:xfrm>
+            <a:off x="4114800" y="5257800"/>
+            <a:ext cx="7251192" cy="822960"/>
+          </a:xfrm>
+          <a:prstGeom prst="rect">
+            <a:avLst/>
+          </a:prstGeom>
+          <a:noFill/>
+          <a:ln/>
+        </p:spPr>
+        <p:txBody>
+          <a:bodyPr wrap="square" rtlCol="0" anchor="ctr"/>
+          <a:lstStyle/>
+          <a:p>
+            <a:pPr algn="l" indent="0" marL="0">
+              <a:lnSpc>
+                <a:spcPts val="1900"/>
+              </a:lnSpc>
+              <a:buNone/>
+            </a:pPr>
+            <a:r>
+              <a:rPr lang="en-US" sz="1300" dirty="0">
+                <a:solidFill>
+                  <a:srgbClr val="33394A"/>
+                </a:solidFill>
+                <a:latin typeface="Calibri" pitchFamily="34" charset="0"/>
+                <a:ea typeface="Calibri" pitchFamily="34" charset="-122"/>
+                <a:cs typeface="Calibri" pitchFamily="34" charset="-120"/>
+              </a:rPr>
+              <a:t>nós recomendamos com convicção. Quem decide são vocês, e fica registrado quem decidiu o quê.</a:t>
+            </a:r>
+            <a:endParaRPr lang="en-US" sz="1300" dirty="0"/>
+          </a:p>
+        </p:txBody>
+      </p:sp>
     </p:spTree>
   </p:cSld>
   <p:clrMapOvr>
@@ -2785,7 +3224,7 @@
                 <a:ea typeface="Calibri" pitchFamily="34" charset="-122"/>
                 <a:cs typeface="Calibri" pitchFamily="34" charset="-120"/>
               </a:rPr>
-              <a:t>POR QUE UM TERCEIRO</a:t>
+              <a:t>COMO SE PARECE</a:t>
             </a:r>
             <a:endParaRPr lang="en-US" sz="1100" dirty="0"/>
           </a:p>
@@ -2827,7 +3266,7 @@
                 <a:ea typeface="Cambria" pitchFamily="34" charset="-122"/>
                 <a:cs typeface="Cambria" pitchFamily="34" charset="-120"/>
               </a:rPr>
-              <a:t>Nenhum time interno pode ser a própria prova.</a:t>
+              <a:t>Um parecer de arbitragem de verdade.</a:t>
             </a:r>
             <a:endParaRPr lang="en-US" sz="2700" dirty="0"/>
           </a:p>
@@ -2841,24 +3280,27 @@
         </p:nvSpPr>
         <p:spPr>
           <a:xfrm>
-            <a:off x="822960" y="6400800"/>
-            <a:ext cx="10543032" cy="274320"/>
-          </a:xfrm>
-          <a:prstGeom prst="rect">
-            <a:avLst/>
-          </a:prstGeom>
-          <a:noFill/>
-          <a:ln/>
-        </p:spPr>
-        <p:txBody>
-          <a:bodyPr wrap="square" rtlCol="0" anchor="ctr"/>
-          <a:lstStyle/>
-          <a:p>
-            <a:pPr algn="ctr" indent="0" marL="0">
-              <a:buNone/>
-            </a:pPr>
-            <a:r>
-              <a:rPr lang="en-US" sz="900" spc="100" kern="0" dirty="0">
+            <a:off x="822960" y="1920240"/>
+            <a:ext cx="10543032" cy="685800"/>
+          </a:xfrm>
+          <a:prstGeom prst="rect">
+            <a:avLst/>
+          </a:prstGeom>
+          <a:noFill/>
+          <a:ln/>
+        </p:spPr>
+        <p:txBody>
+          <a:bodyPr wrap="square" rtlCol="0" anchor="ctr"/>
+          <a:lstStyle/>
+          <a:p>
+            <a:pPr algn="l" indent="0" marL="0">
+              <a:lnSpc>
+                <a:spcPts val="2000"/>
+              </a:lnSpc>
+              <a:buNone/>
+            </a:pPr>
+            <a:r>
+              <a:rPr lang="en-US" sz="1300" dirty="0">
                 <a:solidFill>
                   <a:srgbClr val="6E6858"/>
                 </a:solidFill>
@@ -2866,9 +3308,9 @@
                 <a:ea typeface="Calibri" pitchFamily="34" charset="-122"/>
                 <a:cs typeface="Calibri" pitchFamily="34" charset="-120"/>
               </a:rPr>
-              <a:t>ABBA Consultoria de IA · contato@abbaservices.com.br</a:t>
-            </a:r>
-            <a:endParaRPr lang="en-US" sz="900" dirty="0"/>
+              <a:t>Página real de um parecer entregue (empresa preservada): a proposta do fornecedor decomposta, o preço comparado, a recomendação assinada.</a:t>
+            </a:r>
+            <a:endParaRPr lang="en-US" sz="1300" dirty="0"/>
           </a:p>
         </p:txBody>
       </p:sp>
@@ -2880,134 +3322,61 @@
         </p:nvSpPr>
         <p:spPr>
           <a:xfrm>
-            <a:off x="822960" y="2148840"/>
-            <a:ext cx="10543032" cy="2377440"/>
-          </a:xfrm>
-          <a:prstGeom prst="rect">
-            <a:avLst/>
-          </a:prstGeom>
-          <a:noFill/>
-          <a:ln/>
-        </p:spPr>
-        <p:txBody>
-          <a:bodyPr wrap="square" rtlCol="0" anchor="ctr"/>
-          <a:lstStyle/>
-          <a:p>
-            <a:pPr algn="l" indent="0" marL="0">
-              <a:lnSpc>
-                <a:spcPts val="2400"/>
-              </a:lnSpc>
-              <a:buNone/>
-            </a:pPr>
-            <a:r>
-              <a:rPr lang="en-US" sz="1500" dirty="0">
-                <a:solidFill>
-                  <a:srgbClr val="33394A"/>
+            <a:off x="822960" y="6400800"/>
+            <a:ext cx="10543032" cy="274320"/>
+          </a:xfrm>
+          <a:prstGeom prst="rect">
+            <a:avLst/>
+          </a:prstGeom>
+          <a:noFill/>
+          <a:ln/>
+        </p:spPr>
+        <p:txBody>
+          <a:bodyPr wrap="square" rtlCol="0" anchor="ctr"/>
+          <a:lstStyle/>
+          <a:p>
+            <a:pPr algn="ctr" indent="0" marL="0">
+              <a:buNone/>
+            </a:pPr>
+            <a:r>
+              <a:rPr lang="en-US" sz="900" spc="100" kern="0" dirty="0">
+                <a:solidFill>
+                  <a:srgbClr val="6E6858"/>
                 </a:solidFill>
                 <a:latin typeface="Calibri" pitchFamily="34" charset="0"/>
                 <a:ea typeface="Calibri" pitchFamily="34" charset="-122"/>
                 <a:cs typeface="Calibri" pitchFamily="34" charset="-120"/>
               </a:rPr>
-              <a:t>Quem executa não pode atestar o próprio resultado. É a razão pela qual empresas com um ótimo CFO ainda contratam quem verifique as contas de fora. O Conselheiro traz exatamente isso para a IA: a expectativa declarada antes e imutável, o resultado medido e assinado por uma pessoa nomeada da sua empresa, o histórico que nunca se apaga.</a:t>
-            </a:r>
-            <a:endParaRPr lang="en-US" sz="1500" dirty="0"/>
-          </a:p>
-          <a:p>
-            <a:pPr algn="l" indent="0" marL="0">
-              <a:lnSpc>
-                <a:spcPts val="2400"/>
-              </a:lnSpc>
-              <a:buNone/>
-            </a:pPr>
-            <a:endParaRPr lang="en-US" sz="1500" dirty="0"/>
-          </a:p>
-          <a:p>
-            <a:pPr algn="l" indent="0" marL="0">
-              <a:lnSpc>
-                <a:spcPts val="2400"/>
-              </a:lnSpc>
-              <a:buNone/>
-            </a:pPr>
-            <a:r>
-              <a:rPr lang="en-US" sz="1500" dirty="0">
-                <a:solidFill>
-                  <a:srgbClr val="33394A"/>
-                </a:solidFill>
-                <a:latin typeface="Calibri" pitchFamily="34" charset="0"/>
-                <a:ea typeface="Calibri" pitchFamily="34" charset="-122"/>
-                <a:cs typeface="Calibri" pitchFamily="34" charset="-120"/>
-              </a:rPr>
-              <a:t>Um diretor de IA contratado amanhã não substitui esse registro. Ele o herda, e trabalha melhor por causa dele.</a:t>
-            </a:r>
-            <a:endParaRPr lang="en-US" sz="1500" dirty="0"/>
-          </a:p>
-        </p:txBody>
-      </p:sp>
-      <p:sp>
-        <p:nvSpPr>
-          <p:cNvPr id="6" name="Shape 4"/>
-          <p:cNvSpPr/>
-          <p:nvPr/>
-        </p:nvSpPr>
-        <p:spPr>
-          <a:xfrm>
-            <a:off x="822960" y="4846320"/>
-            <a:ext cx="10543032" cy="0"/>
-          </a:xfrm>
-          <a:prstGeom prst="line">
-            <a:avLst/>
-          </a:prstGeom>
-          <a:noFill/>
-          <a:ln w="9525">
-            <a:solidFill>
-              <a:srgbClr val="E5E0D4"/>
-            </a:solidFill>
-            <a:prstDash val="solid"/>
-          </a:ln>
-        </p:spPr>
-      </p:sp>
-      <p:sp>
-        <p:nvSpPr>
-          <p:cNvPr id="7" name="Text 5"/>
-          <p:cNvSpPr/>
-          <p:nvPr/>
-        </p:nvSpPr>
-        <p:spPr>
-          <a:xfrm>
-            <a:off x="822960" y="5074920"/>
-            <a:ext cx="10543032" cy="731520"/>
-          </a:xfrm>
-          <a:prstGeom prst="rect">
-            <a:avLst/>
-          </a:prstGeom>
-          <a:noFill/>
-          <a:ln/>
-        </p:spPr>
-        <p:txBody>
-          <a:bodyPr wrap="square" rtlCol="0" anchor="ctr"/>
-          <a:lstStyle/>
-          <a:p>
-            <a:pPr algn="l" indent="0" marL="0">
-              <a:lnSpc>
-                <a:spcPts val="2100"/>
-              </a:lnSpc>
-              <a:buNone/>
-            </a:pPr>
-            <a:r>
-              <a:rPr lang="en-US" sz="1350" i="1" dirty="0">
-                <a:solidFill>
-                  <a:srgbClr val="1B2A4A"/>
-                </a:solidFill>
-                <a:latin typeface="Cambria" pitchFamily="34" charset="0"/>
-                <a:ea typeface="Cambria" pitchFamily="34" charset="-122"/>
-                <a:cs typeface="Cambria" pitchFamily="34" charset="-120"/>
-              </a:rPr>
-              <a:t>Sem exclusividade forçada, sem contrato que prende: a memória é sua e é exportável. A permanência se paga em valor, ou não se paga.</a:t>
-            </a:r>
-            <a:endParaRPr lang="en-US" sz="1350" dirty="0"/>
-          </a:p>
-        </p:txBody>
-      </p:sp>
+              <a:t>ABBA Consultoria de IA · contato@abbaservices.com.br</a:t>
+            </a:r>
+            <a:endParaRPr lang="en-US" sz="900" dirty="0"/>
+          </a:p>
+        </p:txBody>
+      </p:sp>
+      <p:pic>
+        <p:nvPicPr>
+          <p:cNvPr id="6" name="Image 0" descr="/home/user/abba-ops/08-materiais/assets/fotos/conselheiro--parecer-arbitragem.jpg">    </p:cNvPr>
+          <p:cNvPicPr>
+            <a:picLocks noChangeAspect="1"/>
+          </p:cNvPicPr>
+          <p:nvPr/>
+        </p:nvPicPr>
+        <p:blipFill>
+          <a:blip r:embed="rId1"/>
+          <a:stretch>
+            <a:fillRect/>
+          </a:stretch>
+        </p:blipFill>
+        <p:spPr>
+          <a:xfrm>
+            <a:off x="4832604" y="2651760"/>
+            <a:ext cx="2523744" cy="3566160"/>
+          </a:xfrm>
+          <a:prstGeom prst="rect">
+            <a:avLst/>
+          </a:prstGeom>
+        </p:spPr>
+      </p:pic>
     </p:spTree>
   </p:cSld>
   <p:clrMapOvr>
@@ -3019,6 +3388,294 @@
 <file path=ppt/slides/slide6.xml><?xml version="1.0" encoding="utf-8"?>
 <p:sld xmlns:a="http://schemas.openxmlformats.org/drawingml/2006/main" xmlns:r="http://schemas.openxmlformats.org/officeDocument/2006/relationships" xmlns:p="http://schemas.openxmlformats.org/presentationml/2006/main">
   <p:cSld name="Slide 6">
+    <p:bg>
+      <p:bgPr>
+        <a:solidFill>
+          <a:srgbClr val="FFFFFF"/>
+        </a:solidFill>
+      </p:bgPr>
+    </p:bg>
+    <p:spTree>
+      <p:nvGrpSpPr>
+        <p:cNvPr id="1" name=""/>
+        <p:cNvGrpSpPr/>
+        <p:nvPr/>
+      </p:nvGrpSpPr>
+      <p:grpSpPr>
+        <a:xfrm>
+          <a:off x="0" y="0"/>
+          <a:ext cx="0" cy="0"/>
+          <a:chOff x="0" y="0"/>
+          <a:chExt cx="0" cy="0"/>
+        </a:xfrm>
+      </p:grpSpPr>
+      <p:sp>
+        <p:nvSpPr>
+          <p:cNvPr id="2" name="Text 0"/>
+          <p:cNvSpPr/>
+          <p:nvPr/>
+        </p:nvSpPr>
+        <p:spPr>
+          <a:xfrm>
+            <a:off x="822960" y="594360"/>
+            <a:ext cx="5486400" cy="292608"/>
+          </a:xfrm>
+          <a:prstGeom prst="rect">
+            <a:avLst/>
+          </a:prstGeom>
+          <a:noFill/>
+          <a:ln/>
+        </p:spPr>
+        <p:txBody>
+          <a:bodyPr wrap="square" rtlCol="0" anchor="ctr"/>
+          <a:lstStyle/>
+          <a:p>
+            <a:pPr algn="l" indent="0" marL="0">
+              <a:buNone/>
+            </a:pPr>
+            <a:r>
+              <a:rPr lang="en-US" sz="1100" b="1" spc="300" kern="0" dirty="0">
+                <a:solidFill>
+                  <a:srgbClr val="C2A35B"/>
+                </a:solidFill>
+                <a:latin typeface="Calibri" pitchFamily="34" charset="0"/>
+                <a:ea typeface="Calibri" pitchFamily="34" charset="-122"/>
+                <a:cs typeface="Calibri" pitchFamily="34" charset="-120"/>
+              </a:rPr>
+              <a:t>POR QUE UM TERCEIRO</a:t>
+            </a:r>
+            <a:endParaRPr lang="en-US" sz="1100" dirty="0"/>
+          </a:p>
+        </p:txBody>
+      </p:sp>
+      <p:sp>
+        <p:nvSpPr>
+          <p:cNvPr id="3" name="Text 1"/>
+          <p:cNvSpPr/>
+          <p:nvPr/>
+        </p:nvSpPr>
+        <p:spPr>
+          <a:xfrm>
+            <a:off x="822960" y="960120"/>
+            <a:ext cx="10543032" cy="914400"/>
+          </a:xfrm>
+          <a:prstGeom prst="rect">
+            <a:avLst/>
+          </a:prstGeom>
+          <a:noFill/>
+          <a:ln/>
+        </p:spPr>
+        <p:txBody>
+          <a:bodyPr wrap="square" rtlCol="0" anchor="ctr"/>
+          <a:lstStyle/>
+          <a:p>
+            <a:pPr indent="0" marL="0">
+              <a:lnSpc>
+                <a:spcPts val="3300"/>
+              </a:lnSpc>
+              <a:buNone/>
+            </a:pPr>
+            <a:r>
+              <a:rPr lang="en-US" sz="2700" b="1" dirty="0">
+                <a:solidFill>
+                  <a:srgbClr val="1B2A4A"/>
+                </a:solidFill>
+                <a:latin typeface="Cambria" pitchFamily="34" charset="0"/>
+                <a:ea typeface="Cambria" pitchFamily="34" charset="-122"/>
+                <a:cs typeface="Cambria" pitchFamily="34" charset="-120"/>
+              </a:rPr>
+              <a:t>Nenhum time interno pode ser a própria prova.</a:t>
+            </a:r>
+            <a:endParaRPr lang="en-US" sz="2700" dirty="0"/>
+          </a:p>
+        </p:txBody>
+      </p:sp>
+      <p:sp>
+        <p:nvSpPr>
+          <p:cNvPr id="4" name="Text 2"/>
+          <p:cNvSpPr/>
+          <p:nvPr/>
+        </p:nvSpPr>
+        <p:spPr>
+          <a:xfrm>
+            <a:off x="822960" y="6400800"/>
+            <a:ext cx="10543032" cy="274320"/>
+          </a:xfrm>
+          <a:prstGeom prst="rect">
+            <a:avLst/>
+          </a:prstGeom>
+          <a:noFill/>
+          <a:ln/>
+        </p:spPr>
+        <p:txBody>
+          <a:bodyPr wrap="square" rtlCol="0" anchor="ctr"/>
+          <a:lstStyle/>
+          <a:p>
+            <a:pPr algn="ctr" indent="0" marL="0">
+              <a:buNone/>
+            </a:pPr>
+            <a:r>
+              <a:rPr lang="en-US" sz="900" spc="100" kern="0" dirty="0">
+                <a:solidFill>
+                  <a:srgbClr val="6E6858"/>
+                </a:solidFill>
+                <a:latin typeface="Calibri" pitchFamily="34" charset="0"/>
+                <a:ea typeface="Calibri" pitchFamily="34" charset="-122"/>
+                <a:cs typeface="Calibri" pitchFamily="34" charset="-120"/>
+              </a:rPr>
+              <a:t>ABBA Consultoria de IA · contato@abbaservices.com.br</a:t>
+            </a:r>
+            <a:endParaRPr lang="en-US" sz="900" dirty="0"/>
+          </a:p>
+        </p:txBody>
+      </p:sp>
+      <p:sp>
+        <p:nvSpPr>
+          <p:cNvPr id="5" name="Text 3"/>
+          <p:cNvSpPr/>
+          <p:nvPr/>
+        </p:nvSpPr>
+        <p:spPr>
+          <a:xfrm>
+            <a:off x="822960" y="2148840"/>
+            <a:ext cx="10543032" cy="2377440"/>
+          </a:xfrm>
+          <a:prstGeom prst="rect">
+            <a:avLst/>
+          </a:prstGeom>
+          <a:noFill/>
+          <a:ln/>
+        </p:spPr>
+        <p:txBody>
+          <a:bodyPr wrap="square" rtlCol="0" anchor="ctr"/>
+          <a:lstStyle/>
+          <a:p>
+            <a:pPr algn="l" indent="0" marL="0">
+              <a:lnSpc>
+                <a:spcPts val="2400"/>
+              </a:lnSpc>
+              <a:buNone/>
+            </a:pPr>
+            <a:r>
+              <a:rPr lang="en-US" sz="1500" dirty="0">
+                <a:solidFill>
+                  <a:srgbClr val="33394A"/>
+                </a:solidFill>
+                <a:latin typeface="Calibri" pitchFamily="34" charset="0"/>
+                <a:ea typeface="Calibri" pitchFamily="34" charset="-122"/>
+                <a:cs typeface="Calibri" pitchFamily="34" charset="-120"/>
+              </a:rPr>
+              <a:t>Quem executa não pode atestar o próprio resultado. É a razão pela qual empresas com um ótimo CFO ainda contratam quem verifique as contas de fora. O Conselheiro traz exatamente isso para a IA: a expectativa declarada antes e imutável, o resultado medido e assinado por uma pessoa nomeada da sua empresa, o histórico que nunca se apaga.</a:t>
+            </a:r>
+            <a:endParaRPr lang="en-US" sz="1500" dirty="0"/>
+          </a:p>
+          <a:p>
+            <a:pPr algn="l" indent="0" marL="0">
+              <a:lnSpc>
+                <a:spcPts val="2400"/>
+              </a:lnSpc>
+              <a:buNone/>
+            </a:pPr>
+            <a:endParaRPr lang="en-US" sz="1500" dirty="0"/>
+          </a:p>
+          <a:p>
+            <a:pPr algn="l" indent="0" marL="0">
+              <a:lnSpc>
+                <a:spcPts val="2400"/>
+              </a:lnSpc>
+              <a:buNone/>
+            </a:pPr>
+            <a:r>
+              <a:rPr lang="en-US" sz="1500" dirty="0">
+                <a:solidFill>
+                  <a:srgbClr val="33394A"/>
+                </a:solidFill>
+                <a:latin typeface="Calibri" pitchFamily="34" charset="0"/>
+                <a:ea typeface="Calibri" pitchFamily="34" charset="-122"/>
+                <a:cs typeface="Calibri" pitchFamily="34" charset="-120"/>
+              </a:rPr>
+              <a:t>Um diretor de IA contratado amanhã não substitui esse registro. Ele o herda, e trabalha melhor por causa dele.</a:t>
+            </a:r>
+            <a:endParaRPr lang="en-US" sz="1500" dirty="0"/>
+          </a:p>
+        </p:txBody>
+      </p:sp>
+      <p:sp>
+        <p:nvSpPr>
+          <p:cNvPr id="6" name="Shape 4"/>
+          <p:cNvSpPr/>
+          <p:nvPr/>
+        </p:nvSpPr>
+        <p:spPr>
+          <a:xfrm>
+            <a:off x="822960" y="4846320"/>
+            <a:ext cx="10543032" cy="0"/>
+          </a:xfrm>
+          <a:prstGeom prst="line">
+            <a:avLst/>
+          </a:prstGeom>
+          <a:noFill/>
+          <a:ln w="9525">
+            <a:solidFill>
+              <a:srgbClr val="E5E0D4"/>
+            </a:solidFill>
+            <a:prstDash val="solid"/>
+          </a:ln>
+        </p:spPr>
+      </p:sp>
+      <p:sp>
+        <p:nvSpPr>
+          <p:cNvPr id="7" name="Text 5"/>
+          <p:cNvSpPr/>
+          <p:nvPr/>
+        </p:nvSpPr>
+        <p:spPr>
+          <a:xfrm>
+            <a:off x="822960" y="5074920"/>
+            <a:ext cx="10543032" cy="731520"/>
+          </a:xfrm>
+          <a:prstGeom prst="rect">
+            <a:avLst/>
+          </a:prstGeom>
+          <a:noFill/>
+          <a:ln/>
+        </p:spPr>
+        <p:txBody>
+          <a:bodyPr wrap="square" rtlCol="0" anchor="ctr"/>
+          <a:lstStyle/>
+          <a:p>
+            <a:pPr algn="l" indent="0" marL="0">
+              <a:lnSpc>
+                <a:spcPts val="2100"/>
+              </a:lnSpc>
+              <a:buNone/>
+            </a:pPr>
+            <a:r>
+              <a:rPr lang="en-US" sz="1350" i="1" dirty="0">
+                <a:solidFill>
+                  <a:srgbClr val="1B2A4A"/>
+                </a:solidFill>
+                <a:latin typeface="Cambria" pitchFamily="34" charset="0"/>
+                <a:ea typeface="Cambria" pitchFamily="34" charset="-122"/>
+                <a:cs typeface="Cambria" pitchFamily="34" charset="-120"/>
+              </a:rPr>
+              <a:t>Sem exclusividade forçada, sem contrato que prende: a memória é sua e é exportável. A permanência se paga em valor, ou não se paga.</a:t>
+            </a:r>
+            <a:endParaRPr lang="en-US" sz="1350" dirty="0"/>
+          </a:p>
+        </p:txBody>
+      </p:sp>
+    </p:spTree>
+  </p:cSld>
+  <p:clrMapOvr>
+    <a:masterClrMapping/>
+  </p:clrMapOvr>
+</p:sld>
+</file>
+
+<file path=ppt/slides/slide7.xml><?xml version="1.0" encoding="utf-8"?>
+<p:sld xmlns:a="http://schemas.openxmlformats.org/drawingml/2006/main" xmlns:r="http://schemas.openxmlformats.org/officeDocument/2006/relationships" xmlns:p="http://schemas.openxmlformats.org/presentationml/2006/main">
+  <p:cSld name="Slide 7">
     <p:bg>
       <p:bgPr>
         <a:solidFill>
